--- a/assets/pptx/catalog-147.pptx
+++ b/assets/pptx/catalog-147.pptx
@@ -3730,7 +3730,7 @@
                 <a:ea typeface="Ebrima"/>
                 <a:cs typeface="Ebrima"/>
               </a:rPr>
-              <a:t>አልቀጥፈውም እጄን ሰድጄ ዛሬ የሚያጠፋ የሚገ'ለውን የሞት ፍሬ ይቅርብኝ እንጂ ከንቱ ከንቱ ጨዋታ አሳስቆ ይለይ የለ ወይ ከውዱ ጌታ (2x)</a:t>
+              <a:t>አልቀጥፈውም እጄን ሰድጄ ዛሬ የሚያጠፋ የሚገ'ለውን የሞት ፍሬ ይቅርብኝ እንጂ ከንቱ ከንቱ ጨዋታ አሳስቆ ይለይ የለ ወይ ከውዱ ጌታ 2x</a:t>
             </a:r>
           </a:p>
         </p:txBody>
@@ -3931,7 +3931,7 @@
                 <a:ea typeface="Ebrima"/>
                 <a:cs typeface="Ebrima"/>
               </a:rPr>
-              <a:t>አይናፍቀኝም ሃገሩ ያ ጨለማ ያ ሃሩሩ ነፃ አውጥቶኛል ጌታዬ በነፃነት ልኖር እፎይ ብዬ (2x)</a:t>
+              <a:t>አይናፍቀኝም ሃገሩ ያ ጨለማ ያ ሃሩሩ ነፃ አውጥቶኛል ጌታዬ በነፃነት ልኖር እፎይ ብዬ 2x</a:t>
             </a:r>
           </a:p>
         </p:txBody>
@@ -4132,7 +4132,7 @@
                 <a:ea typeface="Ebrima"/>
                 <a:cs typeface="Ebrima"/>
               </a:rPr>
-              <a:t>አልቀጥፈውም እጄን ሰድጄ ዛሬ የሚያጠፋ የሚገ'ለውን የሞት ፍሬ ይቅርብኝ እንጂ ከንቱ ከንቱ ጨዋታ አሳስቆ ይለይ የለ ወይ ከውዱ ጌታ (2x)</a:t>
+              <a:t>አልቀጥፈውም እጄን ሰድጄ ዛሬ የሚያጠፋ የሚገ'ለውን የሞት ፍሬ ይቅርብኝ እንጂ ከንቱ ከንቱ ጨዋታ አሳስቆ ይለይ የለ ወይ ከውዱ ጌታ 2x</a:t>
             </a:r>
           </a:p>
         </p:txBody>
